--- a/teaching_ppt/Ch4_太赫兹通信.pptx
+++ b/teaching_ppt/Ch4_太赫兹通信.pptx
@@ -112,28 +112,28 @@
   <p:extLst>
     <p:ext uri="{521415D9-36F7-43E2-AB2F-B90AF26B5E84}">
       <p14:sectionLst xmlns:p14="http://schemas.microsoft.com/office/powerpoint/2010/main">
-        <p14:section name="封面与目录 Opening" id="{fb23dde3-7e3e-5900-4cd0-230d5b12c063}">
+        <p14:section name="封面与目录 Opening" id="{a8dc74da-06a8-98a2-0e35-0978082d6987}">
           <p14:sldIdLst>
             <p14:sldId id="256"/>
             <p14:sldId id="257"/>
           </p14:sldIdLst>
         </p14:section>
-        <p14:section name="4.1 太赫兹与毫米波技术原理" id="{886935d1-09e2-86a8-5711-555af7a42753}">
+        <p14:section name="4.1 太赫兹与毫米波技术原理" id="{fb435449-a4af-b9fa-6642-3ce808a8d74c}">
           <p14:sldIdLst>
             <p14:sldId id="258"/>
           </p14:sldIdLst>
         </p14:section>
-        <p14:section name="4.2 太赫兹通信系统" id="{b500ae3a-7c77-d38a-dc94-654fc73c6e1a}">
+        <p14:section name="4.2 太赫兹通信系统" id="{5194a9f3-6118-6780-5c02-802e01e3446a}">
           <p14:sldIdLst>
             <p14:sldId id="259"/>
           </p14:sldIdLst>
         </p14:section>
-        <p14:section name="4.3 太赫兹通信应用场景" id="{a69dc4b8-425d-c075-e0ea-99d833255324}">
+        <p14:section name="4.3 太赫兹通信应用场景" id="{2bd10d05-7137-e622-8305-9534258fa4d3}">
           <p14:sldIdLst>
             <p14:sldId id="260"/>
           </p14:sldIdLst>
         </p14:section>
-        <p14:section name="结束 Closing" id="{edcd7981-8cc6-e19b-02d9-eda9ece4a2ac}">
+        <p14:section name="结束 Closing" id="{42b26a33-f788-fefc-5aba-e37225887936}">
           <p14:sldIdLst>
             <p14:sldId id="261"/>
           </p14:sldIdLst>
